--- a/public/fun/cards/expert/expert-39.pptx
+++ b/public/fun/cards/expert/expert-39.pptx
@@ -3085,7 +3085,7 @@
     <p:bg>
       <p:bgPr>
         <a:solidFill>
-          <a:srgbClr val="274077"/>
+          <a:srgbClr val="F3F4F6"/>
         </a:solidFill>
         <a:effectLst/>
       </p:bgPr>
@@ -3099,20 +3099,20 @@
       <p:grpSpPr/>
       <p:sp>
         <p:nvSpPr>
-          <p:cNvPr id="2" name="Rectangle 1"/>
+          <p:cNvPr id="2" name="Oval 1"/>
           <p:cNvSpPr/>
           <p:nvPr/>
         </p:nvSpPr>
         <p:spPr>
           <a:xfrm>
-            <a:off x="2196000" y="0"/>
-            <a:ext cx="1044000" cy="1800000"/>
+            <a:off x="1591200" y="208800"/>
+            <a:ext cx="57600" cy="57600"/>
           </a:xfrm>
-          <a:prstGeom prst="rect">
+          <a:prstGeom prst="ellipse">
             <a:avLst/>
           </a:prstGeom>
           <a:solidFill>
-            <a:srgbClr val="D0DAF1"/>
+            <a:srgbClr val="FFB300"/>
           </a:solidFill>
           <a:ln>
             <a:noFill/>
@@ -3128,114 +3128,14 @@
       </p:sp>
       <p:sp>
         <p:nvSpPr>
-          <p:cNvPr id="3" name="Freeform 2"/>
-          <p:cNvSpPr/>
+          <p:cNvPr id="3" name="텍스트"/>
+          <p:cNvSpPr txBox="1"/>
           <p:nvPr/>
         </p:nvSpPr>
         <p:spPr>
           <a:xfrm>
-            <a:off x="2486160" y="578880"/>
-            <a:ext cx="221760" cy="322560"/>
-          </a:xfrm>
-          <a:custGeom>
-            <a:avLst/>
-            <a:gdLst/>
-            <a:ahLst/>
-            <a:cxnLst/>
-            <a:rect l="l" t="t" r="r" b="b"/>
-            <a:pathLst>
-              <a:path w="221760" h="322560">
-                <a:moveTo>
-                  <a:pt x="0" y="0"/>
-                </a:moveTo>
-                <a:lnTo>
-                  <a:pt x="221760" y="40320"/>
-                </a:lnTo>
-                <a:lnTo>
-                  <a:pt x="221760" y="322560"/>
-                </a:lnTo>
-                <a:lnTo>
-                  <a:pt x="0" y="282240"/>
-                </a:lnTo>
-                <a:close/>
-              </a:path>
-            </a:pathLst>
-          </a:custGeom>
-          <a:solidFill>
-            <a:srgbClr val="595959"/>
-          </a:solidFill>
-          <a:ln>
-            <a:noFill/>
-          </a:ln>
-        </p:spPr>
-        <p:txBody>
-          <a:bodyPr rtlCol="0" anchor="ctr"/>
-          <a:lstStyle/>
-          <a:p>
-            <a:pPr algn="ctr"/>
-          </a:p>
-        </p:txBody>
-      </p:sp>
-      <p:sp>
-        <p:nvSpPr>
-          <p:cNvPr id="4" name="Freeform 3"/>
-          <p:cNvSpPr/>
-          <p:nvPr/>
-        </p:nvSpPr>
-        <p:spPr>
-          <a:xfrm>
-            <a:off x="2728080" y="578880"/>
-            <a:ext cx="221760" cy="322560"/>
-          </a:xfrm>
-          <a:custGeom>
-            <a:avLst/>
-            <a:gdLst/>
-            <a:ahLst/>
-            <a:cxnLst/>
-            <a:rect l="l" t="t" r="r" b="b"/>
-            <a:pathLst>
-              <a:path w="221760" h="322560">
-                <a:moveTo>
-                  <a:pt x="221760" y="0"/>
-                </a:moveTo>
-                <a:lnTo>
-                  <a:pt x="0" y="40320"/>
-                </a:lnTo>
-                <a:lnTo>
-                  <a:pt x="0" y="322560"/>
-                </a:lnTo>
-                <a:lnTo>
-                  <a:pt x="221760" y="282240"/>
-                </a:lnTo>
-                <a:close/>
-              </a:path>
-            </a:pathLst>
-          </a:custGeom>
-          <a:solidFill>
-            <a:srgbClr val="B4B4B4"/>
-          </a:solidFill>
-          <a:ln>
-            <a:noFill/>
-          </a:ln>
-        </p:spPr>
-        <p:txBody>
-          <a:bodyPr rtlCol="0" anchor="ctr"/>
-          <a:lstStyle/>
-          <a:p>
-            <a:pPr algn="ctr"/>
-          </a:p>
-        </p:txBody>
-      </p:sp>
-      <p:sp>
-        <p:nvSpPr>
-          <p:cNvPr id="5" name="텍스트"/>
-          <p:cNvSpPr txBox="1"/>
-          <p:nvPr/>
-        </p:nvSpPr>
-        <p:spPr>
-          <a:xfrm>
-            <a:off x="2268000" y="1224000"/>
-            <a:ext cx="900000" cy="216000"/>
+            <a:off x="360000" y="468000"/>
+            <a:ext cx="2520000" cy="360000"/>
           </a:xfrm>
           <a:prstGeom prst="rect">
             <a:avLst/>
@@ -3250,32 +3150,32 @@
           <a:p>
             <a:pPr algn="ctr">
               <a:lnSpc>
-                <a:spcPts val="1160"/>
+                <a:spcPts val="3190"/>
               </a:lnSpc>
             </a:pPr>
             <a:r>
-              <a:rPr sz="800" b="1" spc="150">
+              <a:rPr sz="2200" b="1">
                 <a:solidFill>
-                  <a:srgbClr val="595959"/>
+                  <a:srgbClr val="12151C"/>
                 </a:solidFill>
                 <a:latin typeface="맑은 고딕"/>
                 <a:ea typeface="맑은 고딕"/>
               </a:rPr>
-              <a:t>소속 · 브랜드</a:t>
-            </a:r>
-          </a:p>
-        </p:txBody>
-      </p:sp>
-      <p:sp>
-        <p:nvSpPr>
-          <p:cNvPr id="6" name="텍스트"/>
+              <a:t>곽도하</a:t>
+            </a:r>
+          </a:p>
+        </p:txBody>
+      </p:sp>
+      <p:sp>
+        <p:nvSpPr>
+          <p:cNvPr id="4" name="텍스트"/>
           <p:cNvSpPr txBox="1"/>
           <p:nvPr/>
         </p:nvSpPr>
         <p:spPr>
           <a:xfrm>
-            <a:off x="216000" y="331200"/>
-            <a:ext cx="1872000" cy="313692"/>
+            <a:off x="360000" y="878400"/>
+            <a:ext cx="2520000" cy="171451"/>
           </a:xfrm>
           <a:prstGeom prst="rect">
             <a:avLst/>
@@ -3288,34 +3188,63 @@
           </a:bodyPr>
           <a:lstStyle/>
           <a:p>
-            <a:pPr algn="l">
+            <a:pPr algn="ctr">
               <a:lnSpc>
-                <a:spcPts val="2755"/>
+                <a:spcPts val="1305"/>
               </a:lnSpc>
             </a:pPr>
             <a:r>
-              <a:rPr sz="1900" b="1" spc="50">
+              <a:rPr sz="900" b="0">
                 <a:solidFill>
-                  <a:srgbClr val="FFFFFF"/>
+                  <a:srgbClr val="6B7280"/>
                 </a:solidFill>
                 <a:latin typeface="맑은 고딕"/>
                 <a:ea typeface="맑은 고딕"/>
               </a:rPr>
-              <a:t>곽도하</a:t>
-            </a:r>
-          </a:p>
-        </p:txBody>
-      </p:sp>
-      <p:sp>
-        <p:nvSpPr>
-          <p:cNvPr id="7" name="텍스트"/>
+              <a:t>작가</a:t>
+            </a:r>
+          </a:p>
+        </p:txBody>
+      </p:sp>
+      <p:sp>
+        <p:nvSpPr>
+          <p:cNvPr id="5" name="Rectangle 4"/>
+          <p:cNvSpPr/>
+          <p:nvPr/>
+        </p:nvSpPr>
+        <p:spPr>
+          <a:xfrm>
+            <a:off x="1530000" y="1137600"/>
+            <a:ext cx="180000" cy="14400"/>
+          </a:xfrm>
+          <a:prstGeom prst="rect">
+            <a:avLst/>
+          </a:prstGeom>
+          <a:solidFill>
+            <a:srgbClr val="FFB300"/>
+          </a:solidFill>
+          <a:ln>
+            <a:noFill/>
+          </a:ln>
+        </p:spPr>
+        <p:txBody>
+          <a:bodyPr rtlCol="0" anchor="ctr"/>
+          <a:lstStyle/>
+          <a:p>
+            <a:pPr algn="ctr"/>
+          </a:p>
+        </p:txBody>
+      </p:sp>
+      <p:sp>
+        <p:nvSpPr>
+          <p:cNvPr id="6" name="텍스트"/>
           <p:cNvSpPr txBox="1"/>
           <p:nvPr/>
         </p:nvSpPr>
         <p:spPr>
           <a:xfrm>
-            <a:off x="216000" y="619200"/>
-            <a:ext cx="1872000" cy="122400"/>
+            <a:off x="360000" y="1267200"/>
+            <a:ext cx="2520000" cy="133351"/>
           </a:xfrm>
           <a:prstGeom prst="rect">
             <a:avLst/>
@@ -3328,63 +3257,34 @@
           </a:bodyPr>
           <a:lstStyle/>
           <a:p>
-            <a:pPr algn="l">
+            <a:pPr algn="ctr">
               <a:lnSpc>
-                <a:spcPts val="1232"/>
+                <a:spcPts val="1015"/>
               </a:lnSpc>
             </a:pPr>
             <a:r>
-              <a:rPr sz="850" b="1">
+              <a:rPr sz="700" b="0">
                 <a:solidFill>
-                  <a:srgbClr val="D0DAF1"/>
+                  <a:srgbClr val="12151C"/>
                 </a:solidFill>
                 <a:latin typeface="맑은 고딕"/>
                 <a:ea typeface="맑은 고딕"/>
               </a:rPr>
-              <a:t>작가</a:t>
-            </a:r>
-          </a:p>
-        </p:txBody>
-      </p:sp>
-      <p:sp>
-        <p:nvSpPr>
-          <p:cNvPr id="8" name="Rectangle 7"/>
-          <p:cNvSpPr/>
+              <a:t>010-1234-5678      name@example.com</a:t>
+            </a:r>
+          </a:p>
+        </p:txBody>
+      </p:sp>
+      <p:sp>
+        <p:nvSpPr>
+          <p:cNvPr id="7" name="텍스트"/>
+          <p:cNvSpPr txBox="1"/>
           <p:nvPr/>
         </p:nvSpPr>
         <p:spPr>
           <a:xfrm>
-            <a:off x="216000" y="828000"/>
-            <a:ext cx="201600" cy="14400"/>
-          </a:xfrm>
-          <a:prstGeom prst="rect">
-            <a:avLst/>
-          </a:prstGeom>
-          <a:solidFill>
-            <a:srgbClr val="D0DAF1"/>
-          </a:solidFill>
-          <a:ln>
-            <a:noFill/>
-          </a:ln>
-        </p:spPr>
-        <p:txBody>
-          <a:bodyPr rtlCol="0" anchor="ctr"/>
-          <a:lstStyle/>
-          <a:p>
-            <a:pPr algn="ctr"/>
-          </a:p>
-        </p:txBody>
-      </p:sp>
-      <p:sp>
-        <p:nvSpPr>
-          <p:cNvPr id="9" name="텍스트"/>
-          <p:cNvSpPr txBox="1"/>
-          <p:nvPr/>
-        </p:nvSpPr>
-        <p:spPr>
-          <a:xfrm>
-            <a:off x="216000" y="1008000"/>
-            <a:ext cx="122400" cy="168911"/>
+            <a:off x="360000" y="1425600"/>
+            <a:ext cx="2520000" cy="133351"/>
           </a:xfrm>
           <a:prstGeom prst="rect">
             <a:avLst/>
@@ -3397,34 +3297,34 @@
           </a:bodyPr>
           <a:lstStyle/>
           <a:p>
-            <a:pPr algn="l">
+            <a:pPr algn="ctr">
               <a:lnSpc>
                 <a:spcPts val="1015"/>
               </a:lnSpc>
             </a:pPr>
             <a:r>
-              <a:rPr sz="700" b="1">
+              <a:rPr sz="700" b="0">
                 <a:solidFill>
-                  <a:srgbClr val="D0DAF1"/>
+                  <a:srgbClr val="6B7280"/>
                 </a:solidFill>
                 <a:latin typeface="맑은 고딕"/>
                 <a:ea typeface="맑은 고딕"/>
               </a:rPr>
-              <a:t>T</a:t>
-            </a:r>
-          </a:p>
-        </p:txBody>
-      </p:sp>
-      <p:sp>
-        <p:nvSpPr>
-          <p:cNvPr id="10" name="텍스트"/>
+              <a:t>주소를 입력해 주세요</a:t>
+            </a:r>
+          </a:p>
+        </p:txBody>
+      </p:sp>
+      <p:sp>
+        <p:nvSpPr>
+          <p:cNvPr id="8" name="텍스트"/>
           <p:cNvSpPr txBox="1"/>
           <p:nvPr/>
         </p:nvSpPr>
         <p:spPr>
           <a:xfrm>
-            <a:off x="360000" y="1008000"/>
-            <a:ext cx="1584000" cy="168911"/>
+            <a:off x="360000" y="1576800"/>
+            <a:ext cx="2520000" cy="104776"/>
           </a:xfrm>
           <a:prstGeom prst="rect">
             <a:avLst/>
@@ -3437,180 +3337,20 @@
           </a:bodyPr>
           <a:lstStyle/>
           <a:p>
-            <a:pPr algn="l">
+            <a:pPr algn="ctr">
               <a:lnSpc>
-                <a:spcPts val="1015"/>
+                <a:spcPts val="797"/>
               </a:lnSpc>
             </a:pPr>
             <a:r>
-              <a:rPr sz="700" b="0">
+              <a:rPr sz="550" b="1" spc="300">
                 <a:solidFill>
-                  <a:srgbClr val="FFFFFF"/>
+                  <a:srgbClr val="6B7280"/>
                 </a:solidFill>
                 <a:latin typeface="맑은 고딕"/>
                 <a:ea typeface="맑은 고딕"/>
               </a:rPr>
-              <a:t>010-1234-5678</a:t>
-            </a:r>
-          </a:p>
-        </p:txBody>
-      </p:sp>
-      <p:sp>
-        <p:nvSpPr>
-          <p:cNvPr id="11" name="텍스트"/>
-          <p:cNvSpPr txBox="1"/>
-          <p:nvPr/>
-        </p:nvSpPr>
-        <p:spPr>
-          <a:xfrm>
-            <a:off x="216000" y="1176911"/>
-            <a:ext cx="122400" cy="168911"/>
-          </a:xfrm>
-          <a:prstGeom prst="rect">
-            <a:avLst/>
-          </a:prstGeom>
-          <a:noFill/>
-        </p:spPr>
-        <p:txBody>
-          <a:bodyPr wrap="square" lIns="0" rIns="0" tIns="0" bIns="0" anchor="t">
-            <a:spAutoFit/>
-          </a:bodyPr>
-          <a:lstStyle/>
-          <a:p>
-            <a:pPr algn="l">
-              <a:lnSpc>
-                <a:spcPts val="1015"/>
-              </a:lnSpc>
-            </a:pPr>
-            <a:r>
-              <a:rPr sz="700" b="1">
-                <a:solidFill>
-                  <a:srgbClr val="D0DAF1"/>
-                </a:solidFill>
-                <a:latin typeface="맑은 고딕"/>
-                <a:ea typeface="맑은 고딕"/>
-              </a:rPr>
-              <a:t>E</a:t>
-            </a:r>
-          </a:p>
-        </p:txBody>
-      </p:sp>
-      <p:sp>
-        <p:nvSpPr>
-          <p:cNvPr id="12" name="텍스트"/>
-          <p:cNvSpPr txBox="1"/>
-          <p:nvPr/>
-        </p:nvSpPr>
-        <p:spPr>
-          <a:xfrm>
-            <a:off x="360000" y="1176911"/>
-            <a:ext cx="1584000" cy="168911"/>
-          </a:xfrm>
-          <a:prstGeom prst="rect">
-            <a:avLst/>
-          </a:prstGeom>
-          <a:noFill/>
-        </p:spPr>
-        <p:txBody>
-          <a:bodyPr wrap="square" lIns="0" rIns="0" tIns="0" bIns="0" anchor="t">
-            <a:spAutoFit/>
-          </a:bodyPr>
-          <a:lstStyle/>
-          <a:p>
-            <a:pPr algn="l">
-              <a:lnSpc>
-                <a:spcPts val="1015"/>
-              </a:lnSpc>
-            </a:pPr>
-            <a:r>
-              <a:rPr sz="700" b="0">
-                <a:solidFill>
-                  <a:srgbClr val="FFFFFF"/>
-                </a:solidFill>
-                <a:latin typeface="맑은 고딕"/>
-                <a:ea typeface="맑은 고딕"/>
-              </a:rPr>
-              <a:t>name@example.com</a:t>
-            </a:r>
-          </a:p>
-        </p:txBody>
-      </p:sp>
-      <p:sp>
-        <p:nvSpPr>
-          <p:cNvPr id="13" name="텍스트"/>
-          <p:cNvSpPr txBox="1"/>
-          <p:nvPr/>
-        </p:nvSpPr>
-        <p:spPr>
-          <a:xfrm>
-            <a:off x="216000" y="1345822"/>
-            <a:ext cx="122400" cy="168911"/>
-          </a:xfrm>
-          <a:prstGeom prst="rect">
-            <a:avLst/>
-          </a:prstGeom>
-          <a:noFill/>
-        </p:spPr>
-        <p:txBody>
-          <a:bodyPr wrap="square" lIns="0" rIns="0" tIns="0" bIns="0" anchor="t">
-            <a:spAutoFit/>
-          </a:bodyPr>
-          <a:lstStyle/>
-          <a:p>
-            <a:pPr algn="l">
-              <a:lnSpc>
-                <a:spcPts val="1015"/>
-              </a:lnSpc>
-            </a:pPr>
-            <a:r>
-              <a:rPr sz="700" b="1">
-                <a:solidFill>
-                  <a:srgbClr val="D0DAF1"/>
-                </a:solidFill>
-                <a:latin typeface="맑은 고딕"/>
-                <a:ea typeface="맑은 고딕"/>
-              </a:rPr>
-              <a:t>A</a:t>
-            </a:r>
-          </a:p>
-        </p:txBody>
-      </p:sp>
-      <p:sp>
-        <p:nvSpPr>
-          <p:cNvPr id="14" name="텍스트"/>
-          <p:cNvSpPr txBox="1"/>
-          <p:nvPr/>
-        </p:nvSpPr>
-        <p:spPr>
-          <a:xfrm>
-            <a:off x="360000" y="1345822"/>
-            <a:ext cx="1584000" cy="168911"/>
-          </a:xfrm>
-          <a:prstGeom prst="rect">
-            <a:avLst/>
-          </a:prstGeom>
-          <a:noFill/>
-        </p:spPr>
-        <p:txBody>
-          <a:bodyPr wrap="square" lIns="0" rIns="0" tIns="0" bIns="0" anchor="t">
-            <a:spAutoFit/>
-          </a:bodyPr>
-          <a:lstStyle/>
-          <a:p>
-            <a:pPr algn="l">
-              <a:lnSpc>
-                <a:spcPts val="1015"/>
-              </a:lnSpc>
-            </a:pPr>
-            <a:r>
-              <a:rPr sz="700" b="0">
-                <a:solidFill>
-                  <a:srgbClr val="FFFFFF"/>
-                </a:solidFill>
-                <a:latin typeface="맑은 고딕"/>
-                <a:ea typeface="맑은 고딕"/>
-              </a:rPr>
-              <a:t>주소를 입력해 주세요</a:t>
+              <a:t>소속 · 브랜드</a:t>
             </a:r>
           </a:p>
         </p:txBody>
@@ -3629,7 +3369,7 @@
     <p:bg>
       <p:bgPr>
         <a:solidFill>
-          <a:srgbClr val="FFFFFF"/>
+          <a:srgbClr val="F3F4F6"/>
         </a:solidFill>
         <a:effectLst/>
       </p:bgPr>
@@ -3649,16 +3389,45 @@
         </p:nvSpPr>
         <p:spPr>
           <a:xfrm>
-            <a:off x="108000" y="108000"/>
-            <a:ext cx="3024000" cy="1584000"/>
+            <a:off x="2088000" y="0"/>
+            <a:ext cx="1152000" cy="1800000"/>
           </a:xfrm>
           <a:prstGeom prst="rect">
+            <a:avLst/>
+          </a:prstGeom>
+          <a:solidFill>
+            <a:srgbClr val="FFB300"/>
+          </a:solidFill>
+          <a:ln>
+            <a:noFill/>
+          </a:ln>
+        </p:spPr>
+        <p:txBody>
+          <a:bodyPr rtlCol="0" anchor="ctr"/>
+          <a:lstStyle/>
+          <a:p>
+            <a:pPr algn="ctr"/>
+          </a:p>
+        </p:txBody>
+      </p:sp>
+      <p:sp>
+        <p:nvSpPr>
+          <p:cNvPr id="3" name="Oval 2"/>
+          <p:cNvSpPr/>
+          <p:nvPr/>
+        </p:nvSpPr>
+        <p:spPr>
+          <a:xfrm>
+            <a:off x="2397600" y="633600"/>
+            <a:ext cx="532800" cy="532800"/>
+          </a:xfrm>
+          <a:prstGeom prst="ellipse">
             <a:avLst/>
           </a:prstGeom>
           <a:noFill/>
           <a:ln w="10800">
             <a:solidFill>
-              <a:srgbClr val="335299"/>
+              <a:srgbClr val="12151C"/>
             </a:solidFill>
           </a:ln>
         </p:spPr>
@@ -3672,14 +3441,14 @@
       </p:sp>
       <p:sp>
         <p:nvSpPr>
-          <p:cNvPr id="3" name="텍스트"/>
+          <p:cNvPr id="4" name="텍스트"/>
           <p:cNvSpPr txBox="1"/>
           <p:nvPr/>
         </p:nvSpPr>
         <p:spPr>
           <a:xfrm>
-            <a:off x="396000" y="504000"/>
-            <a:ext cx="2448000" cy="432000"/>
+            <a:off x="2304000" y="684000"/>
+            <a:ext cx="720000" cy="432000"/>
           </a:xfrm>
           <a:prstGeom prst="rect">
             <a:avLst/>
@@ -3694,99 +3463,32 @@
           <a:p>
             <a:pPr algn="ctr">
               <a:lnSpc>
-                <a:spcPts val="1739"/>
+                <a:spcPts val="4350"/>
               </a:lnSpc>
             </a:pPr>
             <a:r>
-              <a:rPr sz="1200" b="1">
+              <a:rPr sz="3000" b="1">
                 <a:solidFill>
-                  <a:srgbClr val="19294D"/>
+                  <a:srgbClr val="12151C"/>
                 </a:solidFill>
                 <a:latin typeface="맑은 고딕"/>
                 <a:ea typeface="맑은 고딕"/>
               </a:rPr>
-              <a:t>한 줄의 문장으로</a:t>
-            </a:r>
-          </a:p>
-          <a:p>
-            <a:pPr algn="ctr">
-              <a:lnSpc>
-                <a:spcPts val="1739"/>
-              </a:lnSpc>
-            </a:pPr>
-            <a:r>
-              <a:rPr sz="1200" b="1">
-                <a:solidFill>
-                  <a:srgbClr val="19294D"/>
-                </a:solidFill>
-                <a:latin typeface="맑은 고딕"/>
-                <a:ea typeface="맑은 고딕"/>
-              </a:rPr>
-              <a:t>마음을 움직입니다</a:t>
-            </a:r>
-          </a:p>
-        </p:txBody>
-      </p:sp>
-      <p:cxnSp>
-        <p:nvCxnSpPr>
-          <p:cNvPr id="4" name="Connector 3"/>
-          <p:cNvCxnSpPr/>
+              <a:t>소</a:t>
+            </a:r>
+          </a:p>
+        </p:txBody>
+      </p:sp>
+      <p:sp>
+        <p:nvSpPr>
+          <p:cNvPr id="5" name="텍스트"/>
+          <p:cNvSpPr txBox="1"/>
           <p:nvPr/>
-        </p:nvCxnSpPr>
+        </p:nvSpPr>
         <p:spPr>
           <a:xfrm>
-            <a:off x="1260000" y="1080000"/>
-            <a:ext cx="684000" cy="0"/>
-          </a:xfrm>
-          <a:prstGeom prst="line">
-            <a:avLst/>
-          </a:prstGeom>
-          <a:ln w="7200">
-            <a:solidFill>
-              <a:srgbClr val="335299"/>
-            </a:solidFill>
-          </a:ln>
-        </p:spPr>
-      </p:cxnSp>
-      <p:sp>
-        <p:nvSpPr>
-          <p:cNvPr id="5" name="Oval 4"/>
-          <p:cNvSpPr/>
-          <p:nvPr/>
-        </p:nvSpPr>
-        <p:spPr>
-          <a:xfrm>
-            <a:off x="1594800" y="1054800"/>
-            <a:ext cx="50400" cy="50400"/>
-          </a:xfrm>
-          <a:prstGeom prst="ellipse">
-            <a:avLst/>
-          </a:prstGeom>
-          <a:solidFill>
-            <a:srgbClr val="335299"/>
-          </a:solidFill>
-          <a:ln>
-            <a:noFill/>
-          </a:ln>
-        </p:spPr>
-        <p:txBody>
-          <a:bodyPr rtlCol="0" anchor="ctr"/>
-          <a:lstStyle/>
-          <a:p>
-            <a:pPr algn="ctr"/>
-          </a:p>
-        </p:txBody>
-      </p:sp>
-      <p:sp>
-        <p:nvSpPr>
-          <p:cNvPr id="6" name="텍스트"/>
-          <p:cNvSpPr txBox="1"/>
-          <p:nvPr/>
-        </p:nvSpPr>
-        <p:spPr>
-          <a:xfrm>
-            <a:off x="360000" y="1224000"/>
-            <a:ext cx="2520000" cy="108000"/>
+            <a:off x="252000" y="540000"/>
+            <a:ext cx="1620000" cy="720000"/>
           </a:xfrm>
           <a:prstGeom prst="rect">
             <a:avLst/>
@@ -3799,121 +3501,78 @@
           </a:bodyPr>
           <a:lstStyle/>
           <a:p>
-            <a:pPr algn="ctr">
+            <a:pPr algn="l">
               <a:lnSpc>
-                <a:spcPts val="1087"/>
+                <a:spcPts val="1739"/>
               </a:lnSpc>
             </a:pPr>
             <a:r>
-              <a:rPr sz="750" b="1" spc="300">
+              <a:rPr sz="1200" b="1">
                 <a:solidFill>
-                  <a:srgbClr val="6A748B"/>
+                  <a:srgbClr val="12151C"/>
+                </a:solidFill>
+                <a:latin typeface="맑은 고딕"/>
+                <a:ea typeface="맑은 고딕"/>
+              </a:rPr>
+              <a:t>한 줄의 문장으로</a:t>
+            </a:r>
+          </a:p>
+          <a:p>
+            <a:pPr algn="l">
+              <a:lnSpc>
+                <a:spcPts val="1739"/>
+              </a:lnSpc>
+            </a:pPr>
+            <a:r>
+              <a:rPr sz="1200" b="1">
+                <a:solidFill>
+                  <a:srgbClr val="12151C"/>
+                </a:solidFill>
+                <a:latin typeface="맑은 고딕"/>
+                <a:ea typeface="맑은 고딕"/>
+              </a:rPr>
+              <a:t>마음을 움직입니다</a:t>
+            </a:r>
+          </a:p>
+        </p:txBody>
+      </p:sp>
+      <p:sp>
+        <p:nvSpPr>
+          <p:cNvPr id="6" name="텍스트"/>
+          <p:cNvSpPr txBox="1"/>
+          <p:nvPr/>
+        </p:nvSpPr>
+        <p:spPr>
+          <a:xfrm>
+            <a:off x="252000" y="1512000"/>
+            <a:ext cx="1584000" cy="123826"/>
+          </a:xfrm>
+          <a:prstGeom prst="rect">
+            <a:avLst/>
+          </a:prstGeom>
+          <a:noFill/>
+        </p:spPr>
+        <p:txBody>
+          <a:bodyPr wrap="square" lIns="0" rIns="0" tIns="0" bIns="0" anchor="t">
+            <a:spAutoFit/>
+          </a:bodyPr>
+          <a:lstStyle/>
+          <a:p>
+            <a:pPr algn="l">
+              <a:lnSpc>
+                <a:spcPts val="942"/>
+              </a:lnSpc>
+            </a:pPr>
+            <a:r>
+              <a:rPr sz="650" b="1" spc="200">
+                <a:solidFill>
+                  <a:srgbClr val="6B7280"/>
                 </a:solidFill>
                 <a:latin typeface="맑은 고딕"/>
                 <a:ea typeface="맑은 고딕"/>
               </a:rPr>
               <a:t>소속 · 브랜드</a:t>
             </a:r>
-          </a:p>
-        </p:txBody>
-      </p:sp>
-      <p:sp>
-        <p:nvSpPr>
-          <p:cNvPr id="7" name="Freeform 6"/>
-          <p:cNvSpPr/>
-          <p:nvPr/>
-        </p:nvSpPr>
-        <p:spPr>
-          <a:xfrm>
-            <a:off x="1537200" y="273600"/>
-            <a:ext cx="79200" cy="115200"/>
-          </a:xfrm>
-          <a:custGeom>
-            <a:avLst/>
-            <a:gdLst/>
-            <a:ahLst/>
-            <a:cxnLst/>
-            <a:rect l="l" t="t" r="r" b="b"/>
-            <a:pathLst>
-              <a:path w="79200" h="115200">
-                <a:moveTo>
-                  <a:pt x="0" y="0"/>
-                </a:moveTo>
-                <a:lnTo>
-                  <a:pt x="79200" y="14400"/>
-                </a:lnTo>
-                <a:lnTo>
-                  <a:pt x="79200" y="115200"/>
-                </a:lnTo>
-                <a:lnTo>
-                  <a:pt x="0" y="100800"/>
-                </a:lnTo>
-                <a:close/>
-              </a:path>
-            </a:pathLst>
-          </a:custGeom>
-          <a:solidFill>
-            <a:srgbClr val="335299"/>
-          </a:solidFill>
-          <a:ln>
-            <a:noFill/>
-          </a:ln>
-        </p:spPr>
-        <p:txBody>
-          <a:bodyPr rtlCol="0" anchor="ctr"/>
-          <a:lstStyle/>
-          <a:p>
-            <a:pPr algn="ctr"/>
-          </a:p>
-        </p:txBody>
-      </p:sp>
-      <p:sp>
-        <p:nvSpPr>
-          <p:cNvPr id="8" name="Freeform 7"/>
-          <p:cNvSpPr/>
-          <p:nvPr/>
-        </p:nvSpPr>
-        <p:spPr>
-          <a:xfrm>
-            <a:off x="1623600" y="273600"/>
-            <a:ext cx="79200" cy="115200"/>
-          </a:xfrm>
-          <a:custGeom>
-            <a:avLst/>
-            <a:gdLst/>
-            <a:ahLst/>
-            <a:cxnLst/>
-            <a:rect l="l" t="t" r="r" b="b"/>
-            <a:pathLst>
-              <a:path w="79200" h="115200">
-                <a:moveTo>
-                  <a:pt x="79200" y="0"/>
-                </a:moveTo>
-                <a:lnTo>
-                  <a:pt x="0" y="14400"/>
-                </a:lnTo>
-                <a:lnTo>
-                  <a:pt x="0" y="115200"/>
-                </a:lnTo>
-                <a:lnTo>
-                  <a:pt x="79200" y="100800"/>
-                </a:lnTo>
-                <a:close/>
-              </a:path>
-            </a:pathLst>
-          </a:custGeom>
-          <a:solidFill>
-            <a:srgbClr val="D0DAF1"/>
-          </a:solidFill>
-          <a:ln>
-            <a:noFill/>
-          </a:ln>
-        </p:spPr>
-        <p:txBody>
-          <a:bodyPr rtlCol="0" anchor="ctr"/>
-          <a:lstStyle/>
-          <a:p>
-            <a:pPr algn="ctr"/>
           </a:p>
         </p:txBody>
       </p:sp>

--- a/public/fun/cards/expert/expert-39.pptx
+++ b/public/fun/cards/expert/expert-39.pptx
@@ -3097,25 +3097,193 @@
         <p:nvPr/>
       </p:nvGrpSpPr>
       <p:grpSpPr/>
-      <p:sp>
-        <p:nvSpPr>
-          <p:cNvPr id="2" name="Oval 1"/>
+      <p:cxnSp>
+        <p:nvCxnSpPr>
+          <p:cNvPr id="2" name="Connector 1"/>
+          <p:cNvCxnSpPr/>
+          <p:nvPr/>
+        </p:nvCxnSpPr>
+        <p:spPr>
+          <a:xfrm>
+            <a:off x="93600" y="122400"/>
+            <a:ext cx="57600" cy="0"/>
+          </a:xfrm>
+          <a:prstGeom prst="line">
+            <a:avLst/>
+          </a:prstGeom>
+          <a:ln w="3600">
+            <a:solidFill>
+              <a:srgbClr val="DCDFE4"/>
+            </a:solidFill>
+          </a:ln>
+        </p:spPr>
+      </p:cxnSp>
+      <p:cxnSp>
+        <p:nvCxnSpPr>
+          <p:cNvPr id="3" name="Connector 2"/>
+          <p:cNvCxnSpPr/>
+          <p:nvPr/>
+        </p:nvCxnSpPr>
+        <p:spPr>
+          <a:xfrm>
+            <a:off x="122400" y="93600"/>
+            <a:ext cx="0" cy="57600"/>
+          </a:xfrm>
+          <a:prstGeom prst="line">
+            <a:avLst/>
+          </a:prstGeom>
+          <a:ln w="3600">
+            <a:solidFill>
+              <a:srgbClr val="DCDFE4"/>
+            </a:solidFill>
+          </a:ln>
+        </p:spPr>
+      </p:cxnSp>
+      <p:cxnSp>
+        <p:nvCxnSpPr>
+          <p:cNvPr id="4" name="Connector 3"/>
+          <p:cNvCxnSpPr/>
+          <p:nvPr/>
+        </p:nvCxnSpPr>
+        <p:spPr>
+          <a:xfrm>
+            <a:off x="3088800" y="122400"/>
+            <a:ext cx="57600" cy="0"/>
+          </a:xfrm>
+          <a:prstGeom prst="line">
+            <a:avLst/>
+          </a:prstGeom>
+          <a:ln w="3600">
+            <a:solidFill>
+              <a:srgbClr val="DCDFE4"/>
+            </a:solidFill>
+          </a:ln>
+        </p:spPr>
+      </p:cxnSp>
+      <p:cxnSp>
+        <p:nvCxnSpPr>
+          <p:cNvPr id="5" name="Connector 4"/>
+          <p:cNvCxnSpPr/>
+          <p:nvPr/>
+        </p:nvCxnSpPr>
+        <p:spPr>
+          <a:xfrm>
+            <a:off x="3117600" y="93600"/>
+            <a:ext cx="0" cy="57600"/>
+          </a:xfrm>
+          <a:prstGeom prst="line">
+            <a:avLst/>
+          </a:prstGeom>
+          <a:ln w="3600">
+            <a:solidFill>
+              <a:srgbClr val="DCDFE4"/>
+            </a:solidFill>
+          </a:ln>
+        </p:spPr>
+      </p:cxnSp>
+      <p:cxnSp>
+        <p:nvCxnSpPr>
+          <p:cNvPr id="6" name="Connector 5"/>
+          <p:cNvCxnSpPr/>
+          <p:nvPr/>
+        </p:nvCxnSpPr>
+        <p:spPr>
+          <a:xfrm>
+            <a:off x="93600" y="1677600"/>
+            <a:ext cx="57600" cy="0"/>
+          </a:xfrm>
+          <a:prstGeom prst="line">
+            <a:avLst/>
+          </a:prstGeom>
+          <a:ln w="3600">
+            <a:solidFill>
+              <a:srgbClr val="DCDFE4"/>
+            </a:solidFill>
+          </a:ln>
+        </p:spPr>
+      </p:cxnSp>
+      <p:cxnSp>
+        <p:nvCxnSpPr>
+          <p:cNvPr id="7" name="Connector 6"/>
+          <p:cNvCxnSpPr/>
+          <p:nvPr/>
+        </p:nvCxnSpPr>
+        <p:spPr>
+          <a:xfrm>
+            <a:off x="122400" y="1648800"/>
+            <a:ext cx="0" cy="57600"/>
+          </a:xfrm>
+          <a:prstGeom prst="line">
+            <a:avLst/>
+          </a:prstGeom>
+          <a:ln w="3600">
+            <a:solidFill>
+              <a:srgbClr val="DCDFE4"/>
+            </a:solidFill>
+          </a:ln>
+        </p:spPr>
+      </p:cxnSp>
+      <p:cxnSp>
+        <p:nvCxnSpPr>
+          <p:cNvPr id="8" name="Connector 7"/>
+          <p:cNvCxnSpPr/>
+          <p:nvPr/>
+        </p:nvCxnSpPr>
+        <p:spPr>
+          <a:xfrm>
+            <a:off x="3088800" y="1677600"/>
+            <a:ext cx="57600" cy="0"/>
+          </a:xfrm>
+          <a:prstGeom prst="line">
+            <a:avLst/>
+          </a:prstGeom>
+          <a:ln w="3600">
+            <a:solidFill>
+              <a:srgbClr val="DCDFE4"/>
+            </a:solidFill>
+          </a:ln>
+        </p:spPr>
+      </p:cxnSp>
+      <p:cxnSp>
+        <p:nvCxnSpPr>
+          <p:cNvPr id="9" name="Connector 8"/>
+          <p:cNvCxnSpPr/>
+          <p:nvPr/>
+        </p:nvCxnSpPr>
+        <p:spPr>
+          <a:xfrm>
+            <a:off x="3117600" y="1648800"/>
+            <a:ext cx="0" cy="57600"/>
+          </a:xfrm>
+          <a:prstGeom prst="line">
+            <a:avLst/>
+          </a:prstGeom>
+          <a:ln w="3600">
+            <a:solidFill>
+              <a:srgbClr val="DCDFE4"/>
+            </a:solidFill>
+          </a:ln>
+        </p:spPr>
+      </p:cxnSp>
+      <p:sp>
+        <p:nvSpPr>
+          <p:cNvPr id="10" name="Oval 9"/>
           <p:cNvSpPr/>
           <p:nvPr/>
         </p:nvSpPr>
         <p:spPr>
           <a:xfrm>
-            <a:off x="1591200" y="208800"/>
-            <a:ext cx="57600" cy="57600"/>
+            <a:off x="1526400" y="237600"/>
+            <a:ext cx="187200" cy="187200"/>
           </a:xfrm>
           <a:prstGeom prst="ellipse">
             <a:avLst/>
           </a:prstGeom>
-          <a:solidFill>
-            <a:srgbClr val="FFB300"/>
-          </a:solidFill>
-          <a:ln>
-            <a:noFill/>
+          <a:noFill/>
+          <a:ln w="5040">
+            <a:solidFill>
+              <a:srgbClr val="FFB300"/>
+            </a:solidFill>
           </a:ln>
         </p:spPr>
         <p:txBody>
@@ -3128,14 +3296,54 @@
       </p:sp>
       <p:sp>
         <p:nvSpPr>
-          <p:cNvPr id="3" name="텍스트"/>
+          <p:cNvPr id="11" name="텍스트"/>
           <p:cNvSpPr txBox="1"/>
           <p:nvPr/>
         </p:nvSpPr>
         <p:spPr>
           <a:xfrm>
-            <a:off x="360000" y="468000"/>
-            <a:ext cx="2520000" cy="360000"/>
+            <a:off x="1476000" y="237600"/>
+            <a:ext cx="288000" cy="187200"/>
+          </a:xfrm>
+          <a:prstGeom prst="rect">
+            <a:avLst/>
+          </a:prstGeom>
+          <a:noFill/>
+        </p:spPr>
+        <p:txBody>
+          <a:bodyPr wrap="square" lIns="0" rIns="0" tIns="0" bIns="0" anchor="ctr">
+            <a:spAutoFit/>
+          </a:bodyPr>
+          <a:lstStyle/>
+          <a:p>
+            <a:pPr algn="ctr">
+              <a:lnSpc>
+                <a:spcPts val="1305"/>
+              </a:lnSpc>
+            </a:pPr>
+            <a:r>
+              <a:rPr sz="900" b="1">
+                <a:solidFill>
+                  <a:srgbClr val="FFB300"/>
+                </a:solidFill>
+                <a:latin typeface="맑은 고딕"/>
+                <a:ea typeface="맑은 고딕"/>
+              </a:rPr>
+              <a:t>소</a:t>
+            </a:r>
+          </a:p>
+        </p:txBody>
+      </p:sp>
+      <p:sp>
+        <p:nvSpPr>
+          <p:cNvPr id="12" name="텍스트"/>
+          <p:cNvSpPr txBox="1"/>
+          <p:nvPr/>
+        </p:nvSpPr>
+        <p:spPr>
+          <a:xfrm>
+            <a:off x="360000" y="540000"/>
+            <a:ext cx="2520000" cy="237600"/>
           </a:xfrm>
           <a:prstGeom prst="rect">
             <a:avLst/>
@@ -3150,11 +3358,11 @@
           <a:p>
             <a:pPr algn="ctr">
               <a:lnSpc>
-                <a:spcPts val="3190"/>
+                <a:spcPts val="1957"/>
               </a:lnSpc>
             </a:pPr>
             <a:r>
-              <a:rPr sz="2200" b="1">
+              <a:rPr sz="1350" b="1" spc="120">
                 <a:solidFill>
                   <a:srgbClr val="12151C"/>
                 </a:solidFill>
@@ -3168,14 +3376,14 @@
       </p:sp>
       <p:sp>
         <p:nvSpPr>
-          <p:cNvPr id="4" name="텍스트"/>
+          <p:cNvPr id="13" name="텍스트"/>
           <p:cNvSpPr txBox="1"/>
           <p:nvPr/>
         </p:nvSpPr>
         <p:spPr>
           <a:xfrm>
-            <a:off x="360000" y="878400"/>
-            <a:ext cx="2520000" cy="171451"/>
+            <a:off x="360000" y="792000"/>
+            <a:ext cx="2520000" cy="133351"/>
           </a:xfrm>
           <a:prstGeom prst="rect">
             <a:avLst/>
@@ -3190,11 +3398,11 @@
           <a:p>
             <a:pPr algn="ctr">
               <a:lnSpc>
-                <a:spcPts val="1305"/>
+                <a:spcPts val="1015"/>
               </a:lnSpc>
             </a:pPr>
             <a:r>
-              <a:rPr sz="900" b="0">
+              <a:rPr sz="700" b="0" spc="60">
                 <a:solidFill>
                   <a:srgbClr val="6B7280"/>
                 </a:solidFill>
@@ -3206,45 +3414,37 @@
           </a:p>
         </p:txBody>
       </p:sp>
-      <p:sp>
-        <p:nvSpPr>
-          <p:cNvPr id="5" name="Rectangle 4"/>
-          <p:cNvSpPr/>
-          <p:nvPr/>
-        </p:nvSpPr>
-        <p:spPr>
-          <a:xfrm>
-            <a:off x="1530000" y="1137600"/>
-            <a:ext cx="180000" cy="14400"/>
-          </a:xfrm>
-          <a:prstGeom prst="rect">
-            <a:avLst/>
-          </a:prstGeom>
-          <a:solidFill>
-            <a:srgbClr val="FFB300"/>
-          </a:solidFill>
-          <a:ln>
-            <a:noFill/>
+      <p:cxnSp>
+        <p:nvCxnSpPr>
+          <p:cNvPr id="14" name="Connector 13"/>
+          <p:cNvCxnSpPr/>
+          <p:nvPr/>
+        </p:nvCxnSpPr>
+        <p:spPr>
+          <a:xfrm>
+            <a:off x="1440000" y="1015200"/>
+            <a:ext cx="360000" cy="0"/>
+          </a:xfrm>
+          <a:prstGeom prst="line">
+            <a:avLst/>
+          </a:prstGeom>
+          <a:ln w="7920">
+            <a:solidFill>
+              <a:srgbClr val="FFB300"/>
+            </a:solidFill>
           </a:ln>
         </p:spPr>
-        <p:txBody>
-          <a:bodyPr rtlCol="0" anchor="ctr"/>
-          <a:lstStyle/>
-          <a:p>
-            <a:pPr algn="ctr"/>
-          </a:p>
-        </p:txBody>
-      </p:sp>
-      <p:sp>
-        <p:nvSpPr>
-          <p:cNvPr id="6" name="텍스트"/>
+      </p:cxnSp>
+      <p:sp>
+        <p:nvSpPr>
+          <p:cNvPr id="15" name="텍스트"/>
           <p:cNvSpPr txBox="1"/>
           <p:nvPr/>
         </p:nvSpPr>
         <p:spPr>
           <a:xfrm>
-            <a:off x="360000" y="1267200"/>
-            <a:ext cx="2520000" cy="133351"/>
+            <a:off x="360000" y="1101600"/>
+            <a:ext cx="2520000" cy="123826"/>
           </a:xfrm>
           <a:prstGeom prst="rect">
             <a:avLst/>
@@ -3259,32 +3459,72 @@
           <a:p>
             <a:pPr algn="ctr">
               <a:lnSpc>
-                <a:spcPts val="1015"/>
+                <a:spcPts val="942"/>
               </a:lnSpc>
             </a:pPr>
             <a:r>
-              <a:rPr sz="700" b="0">
+              <a:rPr sz="650" b="1" spc="220">
+                <a:solidFill>
+                  <a:srgbClr val="6B7280"/>
+                </a:solidFill>
+                <a:latin typeface="맑은 고딕"/>
+                <a:ea typeface="맑은 고딕"/>
+              </a:rPr>
+              <a:t>소속 · 브랜드</a:t>
+            </a:r>
+          </a:p>
+        </p:txBody>
+      </p:sp>
+      <p:sp>
+        <p:nvSpPr>
+          <p:cNvPr id="16" name="텍스트"/>
+          <p:cNvSpPr txBox="1"/>
+          <p:nvPr/>
+        </p:nvSpPr>
+        <p:spPr>
+          <a:xfrm>
+            <a:off x="360000" y="1339200"/>
+            <a:ext cx="2520000" cy="123826"/>
+          </a:xfrm>
+          <a:prstGeom prst="rect">
+            <a:avLst/>
+          </a:prstGeom>
+          <a:noFill/>
+        </p:spPr>
+        <p:txBody>
+          <a:bodyPr wrap="square" lIns="0" rIns="0" tIns="0" bIns="0" anchor="t">
+            <a:spAutoFit/>
+          </a:bodyPr>
+          <a:lstStyle/>
+          <a:p>
+            <a:pPr algn="ctr">
+              <a:lnSpc>
+                <a:spcPts val="942"/>
+              </a:lnSpc>
+            </a:pPr>
+            <a:r>
+              <a:rPr sz="650" b="0">
                 <a:solidFill>
                   <a:srgbClr val="12151C"/>
                 </a:solidFill>
                 <a:latin typeface="맑은 고딕"/>
                 <a:ea typeface="맑은 고딕"/>
               </a:rPr>
-              <a:t>010-1234-5678      name@example.com</a:t>
-            </a:r>
-          </a:p>
-        </p:txBody>
-      </p:sp>
-      <p:sp>
-        <p:nvSpPr>
-          <p:cNvPr id="7" name="텍스트"/>
+              <a:t>010-1234-5678     |     name@example.com</a:t>
+            </a:r>
+          </a:p>
+        </p:txBody>
+      </p:sp>
+      <p:sp>
+        <p:nvSpPr>
+          <p:cNvPr id="17" name="텍스트"/>
           <p:cNvSpPr txBox="1"/>
           <p:nvPr/>
         </p:nvSpPr>
         <p:spPr>
           <a:xfrm>
-            <a:off x="360000" y="1425600"/>
-            <a:ext cx="2520000" cy="133351"/>
+            <a:off x="360000" y="1476000"/>
+            <a:ext cx="2520000" cy="123826"/>
           </a:xfrm>
           <a:prstGeom prst="rect">
             <a:avLst/>
@@ -3299,11 +3539,11 @@
           <a:p>
             <a:pPr algn="ctr">
               <a:lnSpc>
-                <a:spcPts val="1015"/>
+                <a:spcPts val="942"/>
               </a:lnSpc>
             </a:pPr>
             <a:r>
-              <a:rPr sz="700" b="0">
+              <a:rPr sz="650" b="0">
                 <a:solidFill>
                   <a:srgbClr val="6B7280"/>
                 </a:solidFill>
@@ -3311,46 +3551,6 @@
                 <a:ea typeface="맑은 고딕"/>
               </a:rPr>
               <a:t>주소를 입력해 주세요</a:t>
-            </a:r>
-          </a:p>
-        </p:txBody>
-      </p:sp>
-      <p:sp>
-        <p:nvSpPr>
-          <p:cNvPr id="8" name="텍스트"/>
-          <p:cNvSpPr txBox="1"/>
-          <p:nvPr/>
-        </p:nvSpPr>
-        <p:spPr>
-          <a:xfrm>
-            <a:off x="360000" y="1576800"/>
-            <a:ext cx="2520000" cy="104776"/>
-          </a:xfrm>
-          <a:prstGeom prst="rect">
-            <a:avLst/>
-          </a:prstGeom>
-          <a:noFill/>
-        </p:spPr>
-        <p:txBody>
-          <a:bodyPr wrap="square" lIns="0" rIns="0" tIns="0" bIns="0" anchor="t">
-            <a:spAutoFit/>
-          </a:bodyPr>
-          <a:lstStyle/>
-          <a:p>
-            <a:pPr algn="ctr">
-              <a:lnSpc>
-                <a:spcPts val="797"/>
-              </a:lnSpc>
-            </a:pPr>
-            <a:r>
-              <a:rPr sz="550" b="1" spc="300">
-                <a:solidFill>
-                  <a:srgbClr val="6B7280"/>
-                </a:solidFill>
-                <a:latin typeface="맑은 고딕"/>
-                <a:ea typeface="맑은 고딕"/>
-              </a:rPr>
-              <a:t>소속 · 브랜드</a:t>
             </a:r>
           </a:p>
         </p:txBody>
@@ -3389,8 +3589,8 @@
         </p:nvSpPr>
         <p:spPr>
           <a:xfrm>
-            <a:off x="2088000" y="0"/>
-            <a:ext cx="1152000" cy="1800000"/>
+            <a:off x="0" y="0"/>
+            <a:ext cx="1188000" cy="1800000"/>
           </a:xfrm>
           <a:prstGeom prst="rect">
             <a:avLst/>
@@ -3410,27 +3610,657 @@
           </a:p>
         </p:txBody>
       </p:sp>
-      <p:sp>
-        <p:nvSpPr>
-          <p:cNvPr id="3" name="Oval 2"/>
-          <p:cNvSpPr/>
-          <p:nvPr/>
-        </p:nvSpPr>
-        <p:spPr>
-          <a:xfrm>
-            <a:off x="2397600" y="633600"/>
-            <a:ext cx="532800" cy="532800"/>
-          </a:xfrm>
-          <a:prstGeom prst="ellipse">
-            <a:avLst/>
-          </a:prstGeom>
-          <a:noFill/>
-          <a:ln w="10800">
+      <p:cxnSp>
+        <p:nvCxnSpPr>
+          <p:cNvPr id="3" name="Connector 2"/>
+          <p:cNvCxnSpPr/>
+          <p:nvPr/>
+        </p:nvCxnSpPr>
+        <p:spPr>
+          <a:xfrm flipV="1">
+            <a:off x="0" y="1224000"/>
+            <a:ext cx="57600" cy="57600"/>
+          </a:xfrm>
+          <a:prstGeom prst="line">
+            <a:avLst/>
+          </a:prstGeom>
+          <a:ln w="3600">
             <a:solidFill>
               <a:srgbClr val="12151C"/>
             </a:solidFill>
           </a:ln>
         </p:spPr>
+      </p:cxnSp>
+      <p:cxnSp>
+        <p:nvCxnSpPr>
+          <p:cNvPr id="4" name="Connector 3"/>
+          <p:cNvCxnSpPr/>
+          <p:nvPr/>
+        </p:nvCxnSpPr>
+        <p:spPr>
+          <a:xfrm flipV="1">
+            <a:off x="0" y="1224000"/>
+            <a:ext cx="115200" cy="115200"/>
+          </a:xfrm>
+          <a:prstGeom prst="line">
+            <a:avLst/>
+          </a:prstGeom>
+          <a:ln w="3600">
+            <a:solidFill>
+              <a:srgbClr val="12151C"/>
+            </a:solidFill>
+          </a:ln>
+        </p:spPr>
+      </p:cxnSp>
+      <p:cxnSp>
+        <p:nvCxnSpPr>
+          <p:cNvPr id="5" name="Connector 4"/>
+          <p:cNvCxnSpPr/>
+          <p:nvPr/>
+        </p:nvCxnSpPr>
+        <p:spPr>
+          <a:xfrm flipV="1">
+            <a:off x="0" y="1224000"/>
+            <a:ext cx="172800" cy="172800"/>
+          </a:xfrm>
+          <a:prstGeom prst="line">
+            <a:avLst/>
+          </a:prstGeom>
+          <a:ln w="3600">
+            <a:solidFill>
+              <a:srgbClr val="12151C"/>
+            </a:solidFill>
+          </a:ln>
+        </p:spPr>
+      </p:cxnSp>
+      <p:cxnSp>
+        <p:nvCxnSpPr>
+          <p:cNvPr id="6" name="Connector 5"/>
+          <p:cNvCxnSpPr/>
+          <p:nvPr/>
+        </p:nvCxnSpPr>
+        <p:spPr>
+          <a:xfrm flipV="1">
+            <a:off x="0" y="1224000"/>
+            <a:ext cx="230400" cy="230400"/>
+          </a:xfrm>
+          <a:prstGeom prst="line">
+            <a:avLst/>
+          </a:prstGeom>
+          <a:ln w="3600">
+            <a:solidFill>
+              <a:srgbClr val="12151C"/>
+            </a:solidFill>
+          </a:ln>
+        </p:spPr>
+      </p:cxnSp>
+      <p:cxnSp>
+        <p:nvCxnSpPr>
+          <p:cNvPr id="7" name="Connector 6"/>
+          <p:cNvCxnSpPr/>
+          <p:nvPr/>
+        </p:nvCxnSpPr>
+        <p:spPr>
+          <a:xfrm flipV="1">
+            <a:off x="0" y="1224000"/>
+            <a:ext cx="288000" cy="288000"/>
+          </a:xfrm>
+          <a:prstGeom prst="line">
+            <a:avLst/>
+          </a:prstGeom>
+          <a:ln w="3600">
+            <a:solidFill>
+              <a:srgbClr val="12151C"/>
+            </a:solidFill>
+          </a:ln>
+        </p:spPr>
+      </p:cxnSp>
+      <p:cxnSp>
+        <p:nvCxnSpPr>
+          <p:cNvPr id="8" name="Connector 7"/>
+          <p:cNvCxnSpPr/>
+          <p:nvPr/>
+        </p:nvCxnSpPr>
+        <p:spPr>
+          <a:xfrm flipV="1">
+            <a:off x="0" y="1224000"/>
+            <a:ext cx="345600" cy="345600"/>
+          </a:xfrm>
+          <a:prstGeom prst="line">
+            <a:avLst/>
+          </a:prstGeom>
+          <a:ln w="3600">
+            <a:solidFill>
+              <a:srgbClr val="12151C"/>
+            </a:solidFill>
+          </a:ln>
+        </p:spPr>
+      </p:cxnSp>
+      <p:cxnSp>
+        <p:nvCxnSpPr>
+          <p:cNvPr id="9" name="Connector 8"/>
+          <p:cNvCxnSpPr/>
+          <p:nvPr/>
+        </p:nvCxnSpPr>
+        <p:spPr>
+          <a:xfrm flipV="1">
+            <a:off x="0" y="1224000"/>
+            <a:ext cx="403200" cy="403200"/>
+          </a:xfrm>
+          <a:prstGeom prst="line">
+            <a:avLst/>
+          </a:prstGeom>
+          <a:ln w="3600">
+            <a:solidFill>
+              <a:srgbClr val="12151C"/>
+            </a:solidFill>
+          </a:ln>
+        </p:spPr>
+      </p:cxnSp>
+      <p:cxnSp>
+        <p:nvCxnSpPr>
+          <p:cNvPr id="10" name="Connector 9"/>
+          <p:cNvCxnSpPr/>
+          <p:nvPr/>
+        </p:nvCxnSpPr>
+        <p:spPr>
+          <a:xfrm flipV="1">
+            <a:off x="0" y="1224000"/>
+            <a:ext cx="460800" cy="460800"/>
+          </a:xfrm>
+          <a:prstGeom prst="line">
+            <a:avLst/>
+          </a:prstGeom>
+          <a:ln w="3600">
+            <a:solidFill>
+              <a:srgbClr val="12151C"/>
+            </a:solidFill>
+          </a:ln>
+        </p:spPr>
+      </p:cxnSp>
+      <p:cxnSp>
+        <p:nvCxnSpPr>
+          <p:cNvPr id="11" name="Connector 10"/>
+          <p:cNvCxnSpPr/>
+          <p:nvPr/>
+        </p:nvCxnSpPr>
+        <p:spPr>
+          <a:xfrm flipV="1">
+            <a:off x="0" y="1224000"/>
+            <a:ext cx="518400" cy="518400"/>
+          </a:xfrm>
+          <a:prstGeom prst="line">
+            <a:avLst/>
+          </a:prstGeom>
+          <a:ln w="3600">
+            <a:solidFill>
+              <a:srgbClr val="12151C"/>
+            </a:solidFill>
+          </a:ln>
+        </p:spPr>
+      </p:cxnSp>
+      <p:cxnSp>
+        <p:nvCxnSpPr>
+          <p:cNvPr id="12" name="Connector 11"/>
+          <p:cNvCxnSpPr/>
+          <p:nvPr/>
+        </p:nvCxnSpPr>
+        <p:spPr>
+          <a:xfrm flipV="1">
+            <a:off x="0" y="1224000"/>
+            <a:ext cx="576000" cy="576000"/>
+          </a:xfrm>
+          <a:prstGeom prst="line">
+            <a:avLst/>
+          </a:prstGeom>
+          <a:ln w="3600">
+            <a:solidFill>
+              <a:srgbClr val="12151C"/>
+            </a:solidFill>
+          </a:ln>
+        </p:spPr>
+      </p:cxnSp>
+      <p:cxnSp>
+        <p:nvCxnSpPr>
+          <p:cNvPr id="13" name="Connector 12"/>
+          <p:cNvCxnSpPr/>
+          <p:nvPr/>
+        </p:nvCxnSpPr>
+        <p:spPr>
+          <a:xfrm flipV="1">
+            <a:off x="57600" y="1224000"/>
+            <a:ext cx="576000" cy="576000"/>
+          </a:xfrm>
+          <a:prstGeom prst="line">
+            <a:avLst/>
+          </a:prstGeom>
+          <a:ln w="3600">
+            <a:solidFill>
+              <a:srgbClr val="12151C"/>
+            </a:solidFill>
+          </a:ln>
+        </p:spPr>
+      </p:cxnSp>
+      <p:cxnSp>
+        <p:nvCxnSpPr>
+          <p:cNvPr id="14" name="Connector 13"/>
+          <p:cNvCxnSpPr/>
+          <p:nvPr/>
+        </p:nvCxnSpPr>
+        <p:spPr>
+          <a:xfrm flipV="1">
+            <a:off x="115200" y="1224000"/>
+            <a:ext cx="576000" cy="576000"/>
+          </a:xfrm>
+          <a:prstGeom prst="line">
+            <a:avLst/>
+          </a:prstGeom>
+          <a:ln w="3600">
+            <a:solidFill>
+              <a:srgbClr val="12151C"/>
+            </a:solidFill>
+          </a:ln>
+        </p:spPr>
+      </p:cxnSp>
+      <p:cxnSp>
+        <p:nvCxnSpPr>
+          <p:cNvPr id="15" name="Connector 14"/>
+          <p:cNvCxnSpPr/>
+          <p:nvPr/>
+        </p:nvCxnSpPr>
+        <p:spPr>
+          <a:xfrm flipV="1">
+            <a:off x="172800" y="1224000"/>
+            <a:ext cx="576000" cy="576000"/>
+          </a:xfrm>
+          <a:prstGeom prst="line">
+            <a:avLst/>
+          </a:prstGeom>
+          <a:ln w="3600">
+            <a:solidFill>
+              <a:srgbClr val="12151C"/>
+            </a:solidFill>
+          </a:ln>
+        </p:spPr>
+      </p:cxnSp>
+      <p:cxnSp>
+        <p:nvCxnSpPr>
+          <p:cNvPr id="16" name="Connector 15"/>
+          <p:cNvCxnSpPr/>
+          <p:nvPr/>
+        </p:nvCxnSpPr>
+        <p:spPr>
+          <a:xfrm flipV="1">
+            <a:off x="230400" y="1224000"/>
+            <a:ext cx="576000" cy="576000"/>
+          </a:xfrm>
+          <a:prstGeom prst="line">
+            <a:avLst/>
+          </a:prstGeom>
+          <a:ln w="3600">
+            <a:solidFill>
+              <a:srgbClr val="12151C"/>
+            </a:solidFill>
+          </a:ln>
+        </p:spPr>
+      </p:cxnSp>
+      <p:cxnSp>
+        <p:nvCxnSpPr>
+          <p:cNvPr id="17" name="Connector 16"/>
+          <p:cNvCxnSpPr/>
+          <p:nvPr/>
+        </p:nvCxnSpPr>
+        <p:spPr>
+          <a:xfrm flipV="1">
+            <a:off x="288000" y="1224000"/>
+            <a:ext cx="576000" cy="576000"/>
+          </a:xfrm>
+          <a:prstGeom prst="line">
+            <a:avLst/>
+          </a:prstGeom>
+          <a:ln w="3600">
+            <a:solidFill>
+              <a:srgbClr val="12151C"/>
+            </a:solidFill>
+          </a:ln>
+        </p:spPr>
+      </p:cxnSp>
+      <p:cxnSp>
+        <p:nvCxnSpPr>
+          <p:cNvPr id="18" name="Connector 17"/>
+          <p:cNvCxnSpPr/>
+          <p:nvPr/>
+        </p:nvCxnSpPr>
+        <p:spPr>
+          <a:xfrm flipV="1">
+            <a:off x="345600" y="1224000"/>
+            <a:ext cx="576000" cy="576000"/>
+          </a:xfrm>
+          <a:prstGeom prst="line">
+            <a:avLst/>
+          </a:prstGeom>
+          <a:ln w="3600">
+            <a:solidFill>
+              <a:srgbClr val="12151C"/>
+            </a:solidFill>
+          </a:ln>
+        </p:spPr>
+      </p:cxnSp>
+      <p:cxnSp>
+        <p:nvCxnSpPr>
+          <p:cNvPr id="19" name="Connector 18"/>
+          <p:cNvCxnSpPr/>
+          <p:nvPr/>
+        </p:nvCxnSpPr>
+        <p:spPr>
+          <a:xfrm flipV="1">
+            <a:off x="403200" y="1224000"/>
+            <a:ext cx="576000" cy="576000"/>
+          </a:xfrm>
+          <a:prstGeom prst="line">
+            <a:avLst/>
+          </a:prstGeom>
+          <a:ln w="3600">
+            <a:solidFill>
+              <a:srgbClr val="12151C"/>
+            </a:solidFill>
+          </a:ln>
+        </p:spPr>
+      </p:cxnSp>
+      <p:cxnSp>
+        <p:nvCxnSpPr>
+          <p:cNvPr id="20" name="Connector 19"/>
+          <p:cNvCxnSpPr/>
+          <p:nvPr/>
+        </p:nvCxnSpPr>
+        <p:spPr>
+          <a:xfrm flipV="1">
+            <a:off x="460800" y="1224000"/>
+            <a:ext cx="576000" cy="576000"/>
+          </a:xfrm>
+          <a:prstGeom prst="line">
+            <a:avLst/>
+          </a:prstGeom>
+          <a:ln w="3600">
+            <a:solidFill>
+              <a:srgbClr val="12151C"/>
+            </a:solidFill>
+          </a:ln>
+        </p:spPr>
+      </p:cxnSp>
+      <p:cxnSp>
+        <p:nvCxnSpPr>
+          <p:cNvPr id="21" name="Connector 20"/>
+          <p:cNvCxnSpPr/>
+          <p:nvPr/>
+        </p:nvCxnSpPr>
+        <p:spPr>
+          <a:xfrm flipV="1">
+            <a:off x="518400" y="1224000"/>
+            <a:ext cx="576000" cy="576000"/>
+          </a:xfrm>
+          <a:prstGeom prst="line">
+            <a:avLst/>
+          </a:prstGeom>
+          <a:ln w="3600">
+            <a:solidFill>
+              <a:srgbClr val="12151C"/>
+            </a:solidFill>
+          </a:ln>
+        </p:spPr>
+      </p:cxnSp>
+      <p:cxnSp>
+        <p:nvCxnSpPr>
+          <p:cNvPr id="22" name="Connector 21"/>
+          <p:cNvCxnSpPr/>
+          <p:nvPr/>
+        </p:nvCxnSpPr>
+        <p:spPr>
+          <a:xfrm flipV="1">
+            <a:off x="576000" y="1224000"/>
+            <a:ext cx="576000" cy="576000"/>
+          </a:xfrm>
+          <a:prstGeom prst="line">
+            <a:avLst/>
+          </a:prstGeom>
+          <a:ln w="3600">
+            <a:solidFill>
+              <a:srgbClr val="12151C"/>
+            </a:solidFill>
+          </a:ln>
+        </p:spPr>
+      </p:cxnSp>
+      <p:cxnSp>
+        <p:nvCxnSpPr>
+          <p:cNvPr id="23" name="Connector 22"/>
+          <p:cNvCxnSpPr/>
+          <p:nvPr/>
+        </p:nvCxnSpPr>
+        <p:spPr>
+          <a:xfrm flipV="1">
+            <a:off x="633600" y="1245600"/>
+            <a:ext cx="554400" cy="554400"/>
+          </a:xfrm>
+          <a:prstGeom prst="line">
+            <a:avLst/>
+          </a:prstGeom>
+          <a:ln w="3600">
+            <a:solidFill>
+              <a:srgbClr val="12151C"/>
+            </a:solidFill>
+          </a:ln>
+        </p:spPr>
+      </p:cxnSp>
+      <p:cxnSp>
+        <p:nvCxnSpPr>
+          <p:cNvPr id="24" name="Connector 23"/>
+          <p:cNvCxnSpPr/>
+          <p:nvPr/>
+        </p:nvCxnSpPr>
+        <p:spPr>
+          <a:xfrm flipV="1">
+            <a:off x="691200" y="1303200"/>
+            <a:ext cx="496800" cy="496800"/>
+          </a:xfrm>
+          <a:prstGeom prst="line">
+            <a:avLst/>
+          </a:prstGeom>
+          <a:ln w="3600">
+            <a:solidFill>
+              <a:srgbClr val="12151C"/>
+            </a:solidFill>
+          </a:ln>
+        </p:spPr>
+      </p:cxnSp>
+      <p:cxnSp>
+        <p:nvCxnSpPr>
+          <p:cNvPr id="25" name="Connector 24"/>
+          <p:cNvCxnSpPr/>
+          <p:nvPr/>
+        </p:nvCxnSpPr>
+        <p:spPr>
+          <a:xfrm flipV="1">
+            <a:off x="748800" y="1360800"/>
+            <a:ext cx="439200" cy="439200"/>
+          </a:xfrm>
+          <a:prstGeom prst="line">
+            <a:avLst/>
+          </a:prstGeom>
+          <a:ln w="3600">
+            <a:solidFill>
+              <a:srgbClr val="12151C"/>
+            </a:solidFill>
+          </a:ln>
+        </p:spPr>
+      </p:cxnSp>
+      <p:cxnSp>
+        <p:nvCxnSpPr>
+          <p:cNvPr id="26" name="Connector 25"/>
+          <p:cNvCxnSpPr/>
+          <p:nvPr/>
+        </p:nvCxnSpPr>
+        <p:spPr>
+          <a:xfrm flipV="1">
+            <a:off x="806400" y="1418400"/>
+            <a:ext cx="381600" cy="381600"/>
+          </a:xfrm>
+          <a:prstGeom prst="line">
+            <a:avLst/>
+          </a:prstGeom>
+          <a:ln w="3600">
+            <a:solidFill>
+              <a:srgbClr val="12151C"/>
+            </a:solidFill>
+          </a:ln>
+        </p:spPr>
+      </p:cxnSp>
+      <p:cxnSp>
+        <p:nvCxnSpPr>
+          <p:cNvPr id="27" name="Connector 26"/>
+          <p:cNvCxnSpPr/>
+          <p:nvPr/>
+        </p:nvCxnSpPr>
+        <p:spPr>
+          <a:xfrm flipV="1">
+            <a:off x="864000" y="1476000"/>
+            <a:ext cx="324000" cy="324000"/>
+          </a:xfrm>
+          <a:prstGeom prst="line">
+            <a:avLst/>
+          </a:prstGeom>
+          <a:ln w="3600">
+            <a:solidFill>
+              <a:srgbClr val="12151C"/>
+            </a:solidFill>
+          </a:ln>
+        </p:spPr>
+      </p:cxnSp>
+      <p:cxnSp>
+        <p:nvCxnSpPr>
+          <p:cNvPr id="28" name="Connector 27"/>
+          <p:cNvCxnSpPr/>
+          <p:nvPr/>
+        </p:nvCxnSpPr>
+        <p:spPr>
+          <a:xfrm flipV="1">
+            <a:off x="921600" y="1533600"/>
+            <a:ext cx="266400" cy="266400"/>
+          </a:xfrm>
+          <a:prstGeom prst="line">
+            <a:avLst/>
+          </a:prstGeom>
+          <a:ln w="3600">
+            <a:solidFill>
+              <a:srgbClr val="12151C"/>
+            </a:solidFill>
+          </a:ln>
+        </p:spPr>
+      </p:cxnSp>
+      <p:cxnSp>
+        <p:nvCxnSpPr>
+          <p:cNvPr id="29" name="Connector 28"/>
+          <p:cNvCxnSpPr/>
+          <p:nvPr/>
+        </p:nvCxnSpPr>
+        <p:spPr>
+          <a:xfrm flipV="1">
+            <a:off x="979200" y="1591200"/>
+            <a:ext cx="208800" cy="208800"/>
+          </a:xfrm>
+          <a:prstGeom prst="line">
+            <a:avLst/>
+          </a:prstGeom>
+          <a:ln w="3600">
+            <a:solidFill>
+              <a:srgbClr val="12151C"/>
+            </a:solidFill>
+          </a:ln>
+        </p:spPr>
+      </p:cxnSp>
+      <p:cxnSp>
+        <p:nvCxnSpPr>
+          <p:cNvPr id="30" name="Connector 29"/>
+          <p:cNvCxnSpPr/>
+          <p:nvPr/>
+        </p:nvCxnSpPr>
+        <p:spPr>
+          <a:xfrm flipV="1">
+            <a:off x="1036800" y="1648800"/>
+            <a:ext cx="151200" cy="151200"/>
+          </a:xfrm>
+          <a:prstGeom prst="line">
+            <a:avLst/>
+          </a:prstGeom>
+          <a:ln w="3600">
+            <a:solidFill>
+              <a:srgbClr val="12151C"/>
+            </a:solidFill>
+          </a:ln>
+        </p:spPr>
+      </p:cxnSp>
+      <p:cxnSp>
+        <p:nvCxnSpPr>
+          <p:cNvPr id="31" name="Connector 30"/>
+          <p:cNvCxnSpPr/>
+          <p:nvPr/>
+        </p:nvCxnSpPr>
+        <p:spPr>
+          <a:xfrm flipV="1">
+            <a:off x="1094400" y="1706400"/>
+            <a:ext cx="93600" cy="93600"/>
+          </a:xfrm>
+          <a:prstGeom prst="line">
+            <a:avLst/>
+          </a:prstGeom>
+          <a:ln w="3600">
+            <a:solidFill>
+              <a:srgbClr val="12151C"/>
+            </a:solidFill>
+          </a:ln>
+        </p:spPr>
+      </p:cxnSp>
+      <p:cxnSp>
+        <p:nvCxnSpPr>
+          <p:cNvPr id="32" name="Connector 31"/>
+          <p:cNvCxnSpPr/>
+          <p:nvPr/>
+        </p:nvCxnSpPr>
+        <p:spPr>
+          <a:xfrm flipV="1">
+            <a:off x="1152000" y="1764000"/>
+            <a:ext cx="36000" cy="36000"/>
+          </a:xfrm>
+          <a:prstGeom prst="line">
+            <a:avLst/>
+          </a:prstGeom>
+          <a:ln w="3600">
+            <a:solidFill>
+              <a:srgbClr val="12151C"/>
+            </a:solidFill>
+          </a:ln>
+        </p:spPr>
+      </p:cxnSp>
+      <p:sp>
+        <p:nvSpPr>
+          <p:cNvPr id="33" name="Oval 32"/>
+          <p:cNvSpPr/>
+          <p:nvPr/>
+        </p:nvSpPr>
+        <p:spPr>
+          <a:xfrm>
+            <a:off x="216000" y="252000"/>
+            <a:ext cx="288000" cy="288000"/>
+          </a:xfrm>
+          <a:prstGeom prst="ellipse">
+            <a:avLst/>
+          </a:prstGeom>
+          <a:noFill/>
+          <a:ln w="5760">
+            <a:solidFill>
+              <a:srgbClr val="12151C"/>
+            </a:solidFill>
+          </a:ln>
+        </p:spPr>
         <p:txBody>
           <a:bodyPr rtlCol="0" anchor="ctr"/>
           <a:lstStyle/>
@@ -3441,14 +4271,14 @@
       </p:sp>
       <p:sp>
         <p:nvSpPr>
-          <p:cNvPr id="4" name="텍스트"/>
+          <p:cNvPr id="34" name="텍스트"/>
           <p:cNvSpPr txBox="1"/>
           <p:nvPr/>
         </p:nvSpPr>
         <p:spPr>
           <a:xfrm>
-            <a:off x="2304000" y="684000"/>
-            <a:ext cx="720000" cy="432000"/>
+            <a:off x="216000" y="252000"/>
+            <a:ext cx="288000" cy="288000"/>
           </a:xfrm>
           <a:prstGeom prst="rect">
             <a:avLst/>
@@ -3463,11 +4293,11 @@
           <a:p>
             <a:pPr algn="ctr">
               <a:lnSpc>
-                <a:spcPts val="4350"/>
+                <a:spcPts val="2030"/>
               </a:lnSpc>
             </a:pPr>
             <a:r>
-              <a:rPr sz="3000" b="1">
+              <a:rPr sz="1400" b="1">
                 <a:solidFill>
                   <a:srgbClr val="12151C"/>
                 </a:solidFill>
@@ -3481,14 +4311,14 @@
       </p:sp>
       <p:sp>
         <p:nvSpPr>
-          <p:cNvPr id="5" name="텍스트"/>
+          <p:cNvPr id="35" name="텍스트"/>
           <p:cNvSpPr txBox="1"/>
           <p:nvPr/>
         </p:nvSpPr>
         <p:spPr>
           <a:xfrm>
-            <a:off x="252000" y="540000"/>
-            <a:ext cx="1620000" cy="720000"/>
+            <a:off x="216000" y="1440000"/>
+            <a:ext cx="828000" cy="142876"/>
           </a:xfrm>
           <a:prstGeom prst="rect">
             <a:avLst/>
@@ -3503,49 +4333,154 @@
           <a:p>
             <a:pPr algn="l">
               <a:lnSpc>
-                <a:spcPts val="1739"/>
+                <a:spcPts val="1087"/>
               </a:lnSpc>
             </a:pPr>
             <a:r>
-              <a:rPr sz="1200" b="1">
+              <a:rPr sz="750" b="1" spc="100">
                 <a:solidFill>
                   <a:srgbClr val="12151C"/>
                 </a:solidFill>
                 <a:latin typeface="맑은 고딕"/>
                 <a:ea typeface="맑은 고딕"/>
               </a:rPr>
-              <a:t>한 줄의 문장으로</a:t>
-            </a:r>
-          </a:p>
+              <a:t>전문 분야</a:t>
+            </a:r>
+          </a:p>
+        </p:txBody>
+      </p:sp>
+      <p:sp>
+        <p:nvSpPr>
+          <p:cNvPr id="36" name="텍스트"/>
+          <p:cNvSpPr txBox="1"/>
+          <p:nvPr/>
+        </p:nvSpPr>
+        <p:spPr>
+          <a:xfrm>
+            <a:off x="1440000" y="223200"/>
+            <a:ext cx="1080000" cy="99061"/>
+          </a:xfrm>
+          <a:prstGeom prst="rect">
+            <a:avLst/>
+          </a:prstGeom>
+          <a:noFill/>
+        </p:spPr>
+        <p:txBody>
+          <a:bodyPr wrap="square" lIns="0" rIns="0" tIns="0" bIns="0" anchor="t">
+            <a:spAutoFit/>
+          </a:bodyPr>
+          <a:lstStyle/>
           <a:p>
             <a:pPr algn="l">
               <a:lnSpc>
-                <a:spcPts val="1739"/>
+                <a:spcPts val="754"/>
               </a:lnSpc>
             </a:pPr>
             <a:r>
-              <a:rPr sz="1200" b="1">
+              <a:rPr sz="520" b="1" spc="240">
+                <a:solidFill>
+                  <a:srgbClr val="6B7280"/>
+                </a:solidFill>
+                <a:latin typeface="맑은 고딕"/>
+                <a:ea typeface="맑은 고딕"/>
+              </a:rPr>
+              <a:t>전문 분야</a:t>
+            </a:r>
+          </a:p>
+        </p:txBody>
+      </p:sp>
+      <p:cxnSp>
+        <p:nvCxnSpPr>
+          <p:cNvPr id="37" name="Connector 36"/>
+          <p:cNvCxnSpPr/>
+          <p:nvPr/>
+        </p:nvCxnSpPr>
+        <p:spPr>
+          <a:xfrm>
+            <a:off x="1440000" y="360000"/>
+            <a:ext cx="1548000" cy="0"/>
+          </a:xfrm>
+          <a:prstGeom prst="line">
+            <a:avLst/>
+          </a:prstGeom>
+          <a:ln w="3600">
+            <a:solidFill>
+              <a:srgbClr val="DCDFE4"/>
+            </a:solidFill>
+          </a:ln>
+        </p:spPr>
+      </p:cxnSp>
+      <p:sp>
+        <p:nvSpPr>
+          <p:cNvPr id="38" name="텍스트"/>
+          <p:cNvSpPr txBox="1"/>
+          <p:nvPr/>
+        </p:nvSpPr>
+        <p:spPr>
+          <a:xfrm>
+            <a:off x="1440000" y="403200"/>
+            <a:ext cx="1296000" cy="133351"/>
+          </a:xfrm>
+          <a:prstGeom prst="rect">
+            <a:avLst/>
+          </a:prstGeom>
+          <a:noFill/>
+        </p:spPr>
+        <p:txBody>
+          <a:bodyPr wrap="square" lIns="0" rIns="0" tIns="0" bIns="0" anchor="t">
+            <a:spAutoFit/>
+          </a:bodyPr>
+          <a:lstStyle/>
+          <a:p>
+            <a:pPr algn="l">
+              <a:lnSpc>
+                <a:spcPts val="1015"/>
+              </a:lnSpc>
+            </a:pPr>
+            <a:r>
+              <a:rPr sz="700" b="0">
                 <a:solidFill>
                   <a:srgbClr val="12151C"/>
                 </a:solidFill>
                 <a:latin typeface="맑은 고딕"/>
                 <a:ea typeface="맑은 고딕"/>
               </a:rPr>
-              <a:t>마음을 움직입니다</a:t>
-            </a:r>
-          </a:p>
-        </p:txBody>
-      </p:sp>
-      <p:sp>
-        <p:nvSpPr>
-          <p:cNvPr id="6" name="텍스트"/>
+              <a:t>앱 개발</a:t>
+            </a:r>
+          </a:p>
+        </p:txBody>
+      </p:sp>
+      <p:cxnSp>
+        <p:nvCxnSpPr>
+          <p:cNvPr id="39" name="Connector 38"/>
+          <p:cNvCxnSpPr/>
+          <p:nvPr/>
+        </p:nvCxnSpPr>
+        <p:spPr>
+          <a:xfrm>
+            <a:off x="1440000" y="561600"/>
+            <a:ext cx="1548000" cy="0"/>
+          </a:xfrm>
+          <a:prstGeom prst="line">
+            <a:avLst/>
+          </a:prstGeom>
+          <a:ln w="3600">
+            <a:solidFill>
+              <a:srgbClr val="DCDFE4"/>
+            </a:solidFill>
+          </a:ln>
+        </p:spPr>
+      </p:cxnSp>
+      <p:sp>
+        <p:nvSpPr>
+          <p:cNvPr id="40" name="텍스트"/>
           <p:cNvSpPr txBox="1"/>
           <p:nvPr/>
         </p:nvSpPr>
         <p:spPr>
           <a:xfrm>
-            <a:off x="252000" y="1512000"/>
-            <a:ext cx="1584000" cy="123826"/>
+            <a:off x="1440000" y="604800"/>
+            <a:ext cx="1296000" cy="133351"/>
           </a:xfrm>
           <a:prstGeom prst="rect">
             <a:avLst/>
@@ -3560,18 +4495,201 @@
           <a:p>
             <a:pPr algn="l">
               <a:lnSpc>
-                <a:spcPts val="942"/>
+                <a:spcPts val="1015"/>
               </a:lnSpc>
             </a:pPr>
             <a:r>
-              <a:rPr sz="650" b="1" spc="200">
+              <a:rPr sz="700" b="0">
+                <a:solidFill>
+                  <a:srgbClr val="12151C"/>
+                </a:solidFill>
+                <a:latin typeface="맑은 고딕"/>
+                <a:ea typeface="맑은 고딕"/>
+              </a:rPr>
+              <a:t>번역</a:t>
+            </a:r>
+          </a:p>
+        </p:txBody>
+      </p:sp>
+      <p:cxnSp>
+        <p:nvCxnSpPr>
+          <p:cNvPr id="41" name="Connector 40"/>
+          <p:cNvCxnSpPr/>
+          <p:nvPr/>
+        </p:nvCxnSpPr>
+        <p:spPr>
+          <a:xfrm>
+            <a:off x="1440000" y="763200"/>
+            <a:ext cx="1548000" cy="0"/>
+          </a:xfrm>
+          <a:prstGeom prst="line">
+            <a:avLst/>
+          </a:prstGeom>
+          <a:ln w="3600">
+            <a:solidFill>
+              <a:srgbClr val="DCDFE4"/>
+            </a:solidFill>
+          </a:ln>
+        </p:spPr>
+      </p:cxnSp>
+      <p:sp>
+        <p:nvSpPr>
+          <p:cNvPr id="42" name="텍스트"/>
+          <p:cNvSpPr txBox="1"/>
+          <p:nvPr/>
+        </p:nvSpPr>
+        <p:spPr>
+          <a:xfrm>
+            <a:off x="1440000" y="806400"/>
+            <a:ext cx="1296000" cy="133351"/>
+          </a:xfrm>
+          <a:prstGeom prst="rect">
+            <a:avLst/>
+          </a:prstGeom>
+          <a:noFill/>
+        </p:spPr>
+        <p:txBody>
+          <a:bodyPr wrap="square" lIns="0" rIns="0" tIns="0" bIns="0" anchor="t">
+            <a:spAutoFit/>
+          </a:bodyPr>
+          <a:lstStyle/>
+          <a:p>
+            <a:pPr algn="l">
+              <a:lnSpc>
+                <a:spcPts val="1015"/>
+              </a:lnSpc>
+            </a:pPr>
+            <a:r>
+              <a:rPr sz="700" b="0">
+                <a:solidFill>
+                  <a:srgbClr val="12151C"/>
+                </a:solidFill>
+                <a:latin typeface="맑은 고딕"/>
+                <a:ea typeface="맑은 고딕"/>
+              </a:rPr>
+              <a:t>카피라이팅</a:t>
+            </a:r>
+          </a:p>
+        </p:txBody>
+      </p:sp>
+      <p:cxnSp>
+        <p:nvCxnSpPr>
+          <p:cNvPr id="43" name="Connector 42"/>
+          <p:cNvCxnSpPr/>
+          <p:nvPr/>
+        </p:nvCxnSpPr>
+        <p:spPr>
+          <a:xfrm>
+            <a:off x="1440000" y="964800"/>
+            <a:ext cx="1548000" cy="0"/>
+          </a:xfrm>
+          <a:prstGeom prst="line">
+            <a:avLst/>
+          </a:prstGeom>
+          <a:ln w="3600">
+            <a:solidFill>
+              <a:srgbClr val="DCDFE4"/>
+            </a:solidFill>
+          </a:ln>
+        </p:spPr>
+      </p:cxnSp>
+      <p:sp>
+        <p:nvSpPr>
+          <p:cNvPr id="44" name="텍스트"/>
+          <p:cNvSpPr txBox="1"/>
+          <p:nvPr/>
+        </p:nvSpPr>
+        <p:spPr>
+          <a:xfrm>
+            <a:off x="1440000" y="1008000"/>
+            <a:ext cx="1296000" cy="133351"/>
+          </a:xfrm>
+          <a:prstGeom prst="rect">
+            <a:avLst/>
+          </a:prstGeom>
+          <a:noFill/>
+        </p:spPr>
+        <p:txBody>
+          <a:bodyPr wrap="square" lIns="0" rIns="0" tIns="0" bIns="0" anchor="t">
+            <a:spAutoFit/>
+          </a:bodyPr>
+          <a:lstStyle/>
+          <a:p>
+            <a:pPr algn="l">
+              <a:lnSpc>
+                <a:spcPts val="1015"/>
+              </a:lnSpc>
+            </a:pPr>
+            <a:r>
+              <a:rPr sz="700" b="0">
+                <a:solidFill>
+                  <a:srgbClr val="12151C"/>
+                </a:solidFill>
+                <a:latin typeface="맑은 고딕"/>
+                <a:ea typeface="맑은 고딕"/>
+              </a:rPr>
+              <a:t>외주 문의</a:t>
+            </a:r>
+          </a:p>
+        </p:txBody>
+      </p:sp>
+      <p:cxnSp>
+        <p:nvCxnSpPr>
+          <p:cNvPr id="45" name="Connector 44"/>
+          <p:cNvCxnSpPr/>
+          <p:nvPr/>
+        </p:nvCxnSpPr>
+        <p:spPr>
+          <a:xfrm>
+            <a:off x="1440000" y="1166400"/>
+            <a:ext cx="1548000" cy="0"/>
+          </a:xfrm>
+          <a:prstGeom prst="line">
+            <a:avLst/>
+          </a:prstGeom>
+          <a:ln w="3600">
+            <a:solidFill>
+              <a:srgbClr val="DCDFE4"/>
+            </a:solidFill>
+          </a:ln>
+        </p:spPr>
+      </p:cxnSp>
+      <p:sp>
+        <p:nvSpPr>
+          <p:cNvPr id="46" name="텍스트"/>
+          <p:cNvSpPr txBox="1"/>
+          <p:nvPr/>
+        </p:nvSpPr>
+        <p:spPr>
+          <a:xfrm>
+            <a:off x="1440000" y="1569600"/>
+            <a:ext cx="1548000" cy="114301"/>
+          </a:xfrm>
+          <a:prstGeom prst="rect">
+            <a:avLst/>
+          </a:prstGeom>
+          <a:noFill/>
+        </p:spPr>
+        <p:txBody>
+          <a:bodyPr wrap="square" lIns="0" rIns="0" tIns="0" bIns="0" anchor="t">
+            <a:spAutoFit/>
+          </a:bodyPr>
+          <a:lstStyle/>
+          <a:p>
+            <a:pPr algn="l">
+              <a:lnSpc>
+                <a:spcPts val="869"/>
+              </a:lnSpc>
+            </a:pPr>
+            <a:r>
+              <a:rPr sz="600" b="0">
                 <a:solidFill>
                   <a:srgbClr val="6B7280"/>
                 </a:solidFill>
                 <a:latin typeface="맑은 고딕"/>
                 <a:ea typeface="맑은 고딕"/>
               </a:rPr>
-              <a:t>소속 · 브랜드</a:t>
+              <a:t>메일 · 메시지 문의   |   www.example.com</a:t>
             </a:r>
           </a:p>
         </p:txBody>
